--- a/REI-Combinatoria/10b - Fase opcional - Fitxa per l'alumne - Fem de hackers!.pptx
+++ b/REI-Combinatoria/10b - Fase opcional - Fitxa per l'alumne - Fem de hackers!.pptx
@@ -149,13 +149,37 @@
 <file path=ppt/revisionInfo.xml><?xml version="1.0" encoding="utf-8"?>
 <p1510:revInfo xmlns:a="http://schemas.openxmlformats.org/drawingml/2006/main" xmlns:r="http://schemas.openxmlformats.org/officeDocument/2006/relationships" xmlns:p1510="http://schemas.microsoft.com/office/powerpoint/2015/10/main">
   <p1510:revLst>
-    <p1510:client id="{184B16D3-0583-4B86-B9E2-32A8C8837C3C}" v="10" dt="2025-03-03T11:28:09.765"/>
+    <p1510:client id="{31F92F47-B000-47E5-B703-9A1D89C179A8}" v="1" dt="2025-10-16T17:27:36.841"/>
   </p1510:revLst>
 </p1510:revInfo>
 </file>
 
 <file path=ppt/changesInfos/changesInfo1.xml><?xml version="1.0" encoding="utf-8"?>
 <pc:chgInfo xmlns:a="http://schemas.openxmlformats.org/drawingml/2006/main" xmlns:r="http://schemas.openxmlformats.org/officeDocument/2006/relationships" xmlns:ac="http://schemas.microsoft.com/office/drawing/2013/main/command" xmlns:pc="http://schemas.microsoft.com/office/powerpoint/2013/main/command">
+  <pc:docChgLst>
+    <pc:chgData name="Susana Vasquez Elias" userId="e776416f-e583-4d77-b224-146689d50a03" providerId="ADAL" clId="{3C100498-C411-419B-B5E6-C2EF21CD595F}"/>
+    <pc:docChg chg="modSld">
+      <pc:chgData name="Susana Vasquez Elias" userId="e776416f-e583-4d77-b224-146689d50a03" providerId="ADAL" clId="{3C100498-C411-419B-B5E6-C2EF21CD595F}" dt="2025-10-16T17:27:39.915" v="1" actId="1076"/>
+      <pc:docMkLst>
+        <pc:docMk/>
+      </pc:docMkLst>
+      <pc:sldChg chg="addSp modSp mod">
+        <pc:chgData name="Susana Vasquez Elias" userId="e776416f-e583-4d77-b224-146689d50a03" providerId="ADAL" clId="{3C100498-C411-419B-B5E6-C2EF21CD595F}" dt="2025-10-16T17:27:39.915" v="1" actId="1076"/>
+        <pc:sldMkLst>
+          <pc:docMk/>
+          <pc:sldMk cId="0" sldId="256"/>
+        </pc:sldMkLst>
+        <pc:picChg chg="add mod">
+          <ac:chgData name="Susana Vasquez Elias" userId="e776416f-e583-4d77-b224-146689d50a03" providerId="ADAL" clId="{3C100498-C411-419B-B5E6-C2EF21CD595F}" dt="2025-10-16T17:27:39.915" v="1" actId="1076"/>
+          <ac:picMkLst>
+            <pc:docMk/>
+            <pc:sldMk cId="0" sldId="256"/>
+            <ac:picMk id="12" creationId="{2ADF4236-C311-988C-1EAF-F33444BF8989}"/>
+          </ac:picMkLst>
+        </pc:picChg>
+      </pc:sldChg>
+    </pc:docChg>
+  </pc:docChgLst>
   <pc:docChgLst>
     <pc:chgData name="Susana Vásquez" userId="dffc548e-2323-4ffc-a8aa-757e426c1faa" providerId="ADAL" clId="{184B16D3-0583-4B86-B9E2-32A8C8837C3C}"/>
     <pc:docChg chg="undo redo custSel modSld">
@@ -169,78 +193,6 @@
           <pc:docMk/>
           <pc:sldMk cId="0" sldId="256"/>
         </pc:sldMkLst>
-        <pc:spChg chg="mod">
-          <ac:chgData name="Susana Vásquez" userId="dffc548e-2323-4ffc-a8aa-757e426c1faa" providerId="ADAL" clId="{184B16D3-0583-4B86-B9E2-32A8C8837C3C}" dt="2025-03-03T11:23:45.408" v="1002" actId="790"/>
-          <ac:spMkLst>
-            <pc:docMk/>
-            <pc:sldMk cId="0" sldId="256"/>
-            <ac:spMk id="3" creationId="{00000000-0000-0000-0000-000000000000}"/>
-          </ac:spMkLst>
-        </pc:spChg>
-        <pc:spChg chg="mod">
-          <ac:chgData name="Susana Vásquez" userId="dffc548e-2323-4ffc-a8aa-757e426c1faa" providerId="ADAL" clId="{184B16D3-0583-4B86-B9E2-32A8C8837C3C}" dt="2025-03-03T11:23:45.408" v="1002" actId="790"/>
-          <ac:spMkLst>
-            <pc:docMk/>
-            <pc:sldMk cId="0" sldId="256"/>
-            <ac:spMk id="4" creationId="{00000000-0000-0000-0000-000000000000}"/>
-          </ac:spMkLst>
-        </pc:spChg>
-        <pc:spChg chg="mod">
-          <ac:chgData name="Susana Vásquez" userId="dffc548e-2323-4ffc-a8aa-757e426c1faa" providerId="ADAL" clId="{184B16D3-0583-4B86-B9E2-32A8C8837C3C}" dt="2025-03-03T11:23:45.408" v="1002" actId="790"/>
-          <ac:spMkLst>
-            <pc:docMk/>
-            <pc:sldMk cId="0" sldId="256"/>
-            <ac:spMk id="5" creationId="{00000000-0000-0000-0000-000000000000}"/>
-          </ac:spMkLst>
-        </pc:spChg>
-        <pc:spChg chg="mod">
-          <ac:chgData name="Susana Vásquez" userId="dffc548e-2323-4ffc-a8aa-757e426c1faa" providerId="ADAL" clId="{184B16D3-0583-4B86-B9E2-32A8C8837C3C}" dt="2025-03-03T11:23:45.408" v="1002" actId="790"/>
-          <ac:spMkLst>
-            <pc:docMk/>
-            <pc:sldMk cId="0" sldId="256"/>
-            <ac:spMk id="6" creationId="{00000000-0000-0000-0000-000000000000}"/>
-          </ac:spMkLst>
-        </pc:spChg>
-        <pc:spChg chg="mod">
-          <ac:chgData name="Susana Vásquez" userId="dffc548e-2323-4ffc-a8aa-757e426c1faa" providerId="ADAL" clId="{184B16D3-0583-4B86-B9E2-32A8C8837C3C}" dt="2025-03-03T11:23:45.408" v="1002" actId="790"/>
-          <ac:spMkLst>
-            <pc:docMk/>
-            <pc:sldMk cId="0" sldId="256"/>
-            <ac:spMk id="7" creationId="{00000000-0000-0000-0000-000000000000}"/>
-          </ac:spMkLst>
-        </pc:spChg>
-        <pc:spChg chg="mod">
-          <ac:chgData name="Susana Vásquez" userId="dffc548e-2323-4ffc-a8aa-757e426c1faa" providerId="ADAL" clId="{184B16D3-0583-4B86-B9E2-32A8C8837C3C}" dt="2025-03-03T11:23:45.408" v="1002" actId="790"/>
-          <ac:spMkLst>
-            <pc:docMk/>
-            <pc:sldMk cId="0" sldId="256"/>
-            <ac:spMk id="8" creationId="{00000000-0000-0000-0000-000000000000}"/>
-          </ac:spMkLst>
-        </pc:spChg>
-        <pc:spChg chg="mod">
-          <ac:chgData name="Susana Vásquez" userId="dffc548e-2323-4ffc-a8aa-757e426c1faa" providerId="ADAL" clId="{184B16D3-0583-4B86-B9E2-32A8C8837C3C}" dt="2025-03-03T11:23:45.408" v="1002" actId="790"/>
-          <ac:spMkLst>
-            <pc:docMk/>
-            <pc:sldMk cId="0" sldId="256"/>
-            <ac:spMk id="9" creationId="{00000000-0000-0000-0000-000000000000}"/>
-          </ac:spMkLst>
-        </pc:spChg>
-        <pc:spChg chg="mod">
-          <ac:chgData name="Susana Vásquez" userId="dffc548e-2323-4ffc-a8aa-757e426c1faa" providerId="ADAL" clId="{184B16D3-0583-4B86-B9E2-32A8C8837C3C}" dt="2025-03-03T11:23:45.408" v="1002" actId="790"/>
-          <ac:spMkLst>
-            <pc:docMk/>
-            <pc:sldMk cId="0" sldId="256"/>
-            <ac:spMk id="10" creationId="{00000000-0000-0000-0000-000000000000}"/>
-          </ac:spMkLst>
-        </pc:spChg>
-        <pc:spChg chg="mod">
-          <ac:chgData name="Susana Vásquez" userId="dffc548e-2323-4ffc-a8aa-757e426c1faa" providerId="ADAL" clId="{184B16D3-0583-4B86-B9E2-32A8C8837C3C}" dt="2025-03-03T11:23:45.408" v="1002" actId="790"/>
-          <ac:spMkLst>
-            <pc:docMk/>
-            <pc:sldMk cId="0" sldId="256"/>
-            <ac:spMk id="11" creationId="{00000000-0000-0000-0000-000000000000}"/>
-          </ac:spMkLst>
-        </pc:spChg>
       </pc:sldChg>
       <pc:sldChg chg="addSp delSp modSp mod">
         <pc:chgData name="Susana Vásquez" userId="dffc548e-2323-4ffc-a8aa-757e426c1faa" providerId="ADAL" clId="{184B16D3-0583-4B86-B9E2-32A8C8837C3C}" dt="2025-03-03T11:29:33.254" v="1128" actId="1035"/>
@@ -248,198 +200,6 @@
           <pc:docMk/>
           <pc:sldMk cId="0" sldId="257"/>
         </pc:sldMkLst>
-        <pc:spChg chg="mod">
-          <ac:chgData name="Susana Vásquez" userId="dffc548e-2323-4ffc-a8aa-757e426c1faa" providerId="ADAL" clId="{184B16D3-0583-4B86-B9E2-32A8C8837C3C}" dt="2025-03-03T11:23:45.408" v="1002" actId="790"/>
-          <ac:spMkLst>
-            <pc:docMk/>
-            <pc:sldMk cId="0" sldId="257"/>
-            <ac:spMk id="3" creationId="{00000000-0000-0000-0000-000000000000}"/>
-          </ac:spMkLst>
-        </pc:spChg>
-        <pc:spChg chg="mod">
-          <ac:chgData name="Susana Vásquez" userId="dffc548e-2323-4ffc-a8aa-757e426c1faa" providerId="ADAL" clId="{184B16D3-0583-4B86-B9E2-32A8C8837C3C}" dt="2025-03-03T11:23:45.408" v="1002" actId="790"/>
-          <ac:spMkLst>
-            <pc:docMk/>
-            <pc:sldMk cId="0" sldId="257"/>
-            <ac:spMk id="4" creationId="{00000000-0000-0000-0000-000000000000}"/>
-          </ac:spMkLst>
-        </pc:spChg>
-        <pc:spChg chg="mod">
-          <ac:chgData name="Susana Vásquez" userId="dffc548e-2323-4ffc-a8aa-757e426c1faa" providerId="ADAL" clId="{184B16D3-0583-4B86-B9E2-32A8C8837C3C}" dt="2025-03-03T11:23:45.408" v="1002" actId="790"/>
-          <ac:spMkLst>
-            <pc:docMk/>
-            <pc:sldMk cId="0" sldId="257"/>
-            <ac:spMk id="6" creationId="{00000000-0000-0000-0000-000000000000}"/>
-          </ac:spMkLst>
-        </pc:spChg>
-        <pc:spChg chg="del topLvl">
-          <ac:chgData name="Susana Vásquez" userId="dffc548e-2323-4ffc-a8aa-757e426c1faa" providerId="ADAL" clId="{184B16D3-0583-4B86-B9E2-32A8C8837C3C}" dt="2025-03-03T11:27:25.966" v="1057" actId="478"/>
-          <ac:spMkLst>
-            <pc:docMk/>
-            <pc:sldMk cId="0" sldId="257"/>
-            <ac:spMk id="10" creationId="{00000000-0000-0000-0000-000000000000}"/>
-          </ac:spMkLst>
-        </pc:spChg>
-        <pc:spChg chg="mod topLvl">
-          <ac:chgData name="Susana Vásquez" userId="dffc548e-2323-4ffc-a8aa-757e426c1faa" providerId="ADAL" clId="{184B16D3-0583-4B86-B9E2-32A8C8837C3C}" dt="2025-03-03T11:27:25.966" v="1057" actId="478"/>
-          <ac:spMkLst>
-            <pc:docMk/>
-            <pc:sldMk cId="0" sldId="257"/>
-            <ac:spMk id="11" creationId="{00000000-0000-0000-0000-000000000000}"/>
-          </ac:spMkLst>
-        </pc:spChg>
-        <pc:spChg chg="del">
-          <ac:chgData name="Susana Vásquez" userId="dffc548e-2323-4ffc-a8aa-757e426c1faa" providerId="ADAL" clId="{184B16D3-0583-4B86-B9E2-32A8C8837C3C}" dt="2025-03-03T11:27:29.134" v="1059" actId="478"/>
-          <ac:spMkLst>
-            <pc:docMk/>
-            <pc:sldMk cId="0" sldId="257"/>
-            <ac:spMk id="13" creationId="{00000000-0000-0000-0000-000000000000}"/>
-          </ac:spMkLst>
-        </pc:spChg>
-        <pc:spChg chg="mod">
-          <ac:chgData name="Susana Vásquez" userId="dffc548e-2323-4ffc-a8aa-757e426c1faa" providerId="ADAL" clId="{184B16D3-0583-4B86-B9E2-32A8C8837C3C}" dt="2025-03-03T11:23:45.408" v="1002" actId="790"/>
-          <ac:spMkLst>
-            <pc:docMk/>
-            <pc:sldMk cId="0" sldId="257"/>
-            <ac:spMk id="14" creationId="{00000000-0000-0000-0000-000000000000}"/>
-          </ac:spMkLst>
-        </pc:spChg>
-        <pc:spChg chg="mod">
-          <ac:chgData name="Susana Vásquez" userId="dffc548e-2323-4ffc-a8aa-757e426c1faa" providerId="ADAL" clId="{184B16D3-0583-4B86-B9E2-32A8C8837C3C}" dt="2025-03-03T11:23:45.408" v="1002" actId="790"/>
-          <ac:spMkLst>
-            <pc:docMk/>
-            <pc:sldMk cId="0" sldId="257"/>
-            <ac:spMk id="17" creationId="{00000000-0000-0000-0000-000000000000}"/>
-          </ac:spMkLst>
-        </pc:spChg>
-        <pc:spChg chg="mod">
-          <ac:chgData name="Susana Vásquez" userId="dffc548e-2323-4ffc-a8aa-757e426c1faa" providerId="ADAL" clId="{184B16D3-0583-4B86-B9E2-32A8C8837C3C}" dt="2025-03-03T11:29:33.254" v="1128" actId="1035"/>
-          <ac:spMkLst>
-            <pc:docMk/>
-            <pc:sldMk cId="0" sldId="257"/>
-            <ac:spMk id="23" creationId="{AAB3E5E1-62BA-DA63-3BDB-0ACFFFFD7FA6}"/>
-          </ac:spMkLst>
-        </pc:spChg>
-        <pc:spChg chg="mod">
-          <ac:chgData name="Susana Vásquez" userId="dffc548e-2323-4ffc-a8aa-757e426c1faa" providerId="ADAL" clId="{184B16D3-0583-4B86-B9E2-32A8C8837C3C}" dt="2025-03-03T11:29:33.254" v="1128" actId="1035"/>
-          <ac:spMkLst>
-            <pc:docMk/>
-            <pc:sldMk cId="0" sldId="257"/>
-            <ac:spMk id="24" creationId="{A684A2A2-3C93-5F0E-72A8-AAF7B89AA4A1}"/>
-          </ac:spMkLst>
-        </pc:spChg>
-        <pc:spChg chg="mod">
-          <ac:chgData name="Susana Vásquez" userId="dffc548e-2323-4ffc-a8aa-757e426c1faa" providerId="ADAL" clId="{184B16D3-0583-4B86-B9E2-32A8C8837C3C}" dt="2025-03-03T11:29:33.254" v="1128" actId="1035"/>
-          <ac:spMkLst>
-            <pc:docMk/>
-            <pc:sldMk cId="0" sldId="257"/>
-            <ac:spMk id="25" creationId="{CE3EA57C-A5B9-14A8-D529-64B22CC3A16C}"/>
-          </ac:spMkLst>
-        </pc:spChg>
-        <pc:spChg chg="mod">
-          <ac:chgData name="Susana Vásquez" userId="dffc548e-2323-4ffc-a8aa-757e426c1faa" providerId="ADAL" clId="{184B16D3-0583-4B86-B9E2-32A8C8837C3C}" dt="2025-03-03T11:29:33.254" v="1128" actId="1035"/>
-          <ac:spMkLst>
-            <pc:docMk/>
-            <pc:sldMk cId="0" sldId="257"/>
-            <ac:spMk id="26" creationId="{E59A3058-7D71-D6C6-EF1A-4FE1569C3818}"/>
-          </ac:spMkLst>
-        </pc:spChg>
-        <pc:spChg chg="mod">
-          <ac:chgData name="Susana Vásquez" userId="dffc548e-2323-4ffc-a8aa-757e426c1faa" providerId="ADAL" clId="{184B16D3-0583-4B86-B9E2-32A8C8837C3C}" dt="2025-03-03T11:29:33.254" v="1128" actId="1035"/>
-          <ac:spMkLst>
-            <pc:docMk/>
-            <pc:sldMk cId="0" sldId="257"/>
-            <ac:spMk id="27" creationId="{6E62626F-E9C1-B45D-4F3C-480904DC9404}"/>
-          </ac:spMkLst>
-        </pc:spChg>
-        <pc:spChg chg="mod">
-          <ac:chgData name="Susana Vásquez" userId="dffc548e-2323-4ffc-a8aa-757e426c1faa" providerId="ADAL" clId="{184B16D3-0583-4B86-B9E2-32A8C8837C3C}" dt="2025-03-03T11:29:33.254" v="1128" actId="1035"/>
-          <ac:spMkLst>
-            <pc:docMk/>
-            <pc:sldMk cId="0" sldId="257"/>
-            <ac:spMk id="28" creationId="{B3C556D5-62EF-1CBB-B17D-8B9A1E32325A}"/>
-          </ac:spMkLst>
-        </pc:spChg>
-        <pc:spChg chg="mod">
-          <ac:chgData name="Susana Vásquez" userId="dffc548e-2323-4ffc-a8aa-757e426c1faa" providerId="ADAL" clId="{184B16D3-0583-4B86-B9E2-32A8C8837C3C}" dt="2025-03-03T11:27:26.496" v="1058"/>
-          <ac:spMkLst>
-            <pc:docMk/>
-            <pc:sldMk cId="0" sldId="257"/>
-            <ac:spMk id="29" creationId="{68D85D8D-1CDF-095B-CC07-D5412653C181}"/>
-          </ac:spMkLst>
-        </pc:spChg>
-        <pc:spChg chg="mod">
-          <ac:chgData name="Susana Vásquez" userId="dffc548e-2323-4ffc-a8aa-757e426c1faa" providerId="ADAL" clId="{184B16D3-0583-4B86-B9E2-32A8C8837C3C}" dt="2025-03-03T11:27:26.496" v="1058"/>
-          <ac:spMkLst>
-            <pc:docMk/>
-            <pc:sldMk cId="0" sldId="257"/>
-            <ac:spMk id="30" creationId="{6D1F6E63-7960-2EE8-FB4B-898E27761466}"/>
-          </ac:spMkLst>
-        </pc:spChg>
-        <pc:spChg chg="add mod">
-          <ac:chgData name="Susana Vásquez" userId="dffc548e-2323-4ffc-a8aa-757e426c1faa" providerId="ADAL" clId="{184B16D3-0583-4B86-B9E2-32A8C8837C3C}" dt="2025-03-03T11:27:26.496" v="1058"/>
-          <ac:spMkLst>
-            <pc:docMk/>
-            <pc:sldMk cId="0" sldId="257"/>
-            <ac:spMk id="31" creationId="{1C2E7D07-B7C9-667D-0CBE-E17737339E92}"/>
-          </ac:spMkLst>
-        </pc:spChg>
-        <pc:spChg chg="mod">
-          <ac:chgData name="Susana Vásquez" userId="dffc548e-2323-4ffc-a8aa-757e426c1faa" providerId="ADAL" clId="{184B16D3-0583-4B86-B9E2-32A8C8837C3C}" dt="2025-03-03T11:27:29.444" v="1060"/>
-          <ac:spMkLst>
-            <pc:docMk/>
-            <pc:sldMk cId="0" sldId="257"/>
-            <ac:spMk id="33" creationId="{B776ADD1-60B7-198F-3505-D95F4DC7D832}"/>
-          </ac:spMkLst>
-        </pc:spChg>
-        <pc:spChg chg="mod">
-          <ac:chgData name="Susana Vásquez" userId="dffc548e-2323-4ffc-a8aa-757e426c1faa" providerId="ADAL" clId="{184B16D3-0583-4B86-B9E2-32A8C8837C3C}" dt="2025-03-03T11:27:29.444" v="1060"/>
-          <ac:spMkLst>
-            <pc:docMk/>
-            <pc:sldMk cId="0" sldId="257"/>
-            <ac:spMk id="34" creationId="{725260EB-0900-5B24-DFFC-EB9B39311B61}"/>
-          </ac:spMkLst>
-        </pc:spChg>
-        <pc:spChg chg="add mod">
-          <ac:chgData name="Susana Vásquez" userId="dffc548e-2323-4ffc-a8aa-757e426c1faa" providerId="ADAL" clId="{184B16D3-0583-4B86-B9E2-32A8C8837C3C}" dt="2025-03-03T11:27:29.444" v="1060"/>
-          <ac:spMkLst>
-            <pc:docMk/>
-            <pc:sldMk cId="0" sldId="257"/>
-            <ac:spMk id="35" creationId="{A3694D6D-CA9F-89A1-C8DD-B58D742C2EC7}"/>
-          </ac:spMkLst>
-        </pc:spChg>
-        <pc:grpChg chg="add del">
-          <ac:chgData name="Susana Vásquez" userId="dffc548e-2323-4ffc-a8aa-757e426c1faa" providerId="ADAL" clId="{184B16D3-0583-4B86-B9E2-32A8C8837C3C}" dt="2025-03-03T11:27:25.966" v="1057" actId="478"/>
-          <ac:grpSpMkLst>
-            <pc:docMk/>
-            <pc:sldMk cId="0" sldId="257"/>
-            <ac:grpSpMk id="9" creationId="{00000000-0000-0000-0000-000000000000}"/>
-          </ac:grpSpMkLst>
-        </pc:grpChg>
-        <pc:grpChg chg="add mod">
-          <ac:chgData name="Susana Vásquez" userId="dffc548e-2323-4ffc-a8aa-757e426c1faa" providerId="ADAL" clId="{184B16D3-0583-4B86-B9E2-32A8C8837C3C}" dt="2025-03-03T11:27:26.496" v="1058"/>
-          <ac:grpSpMkLst>
-            <pc:docMk/>
-            <pc:sldMk cId="0" sldId="257"/>
-            <ac:grpSpMk id="12" creationId="{4C3199BC-29FB-200F-D4EA-628532A62C29}"/>
-          </ac:grpSpMkLst>
-        </pc:grpChg>
-        <pc:grpChg chg="del">
-          <ac:chgData name="Susana Vásquez" userId="dffc548e-2323-4ffc-a8aa-757e426c1faa" providerId="ADAL" clId="{184B16D3-0583-4B86-B9E2-32A8C8837C3C}" dt="2025-03-03T11:27:19.915" v="1054" actId="478"/>
-          <ac:grpSpMkLst>
-            <pc:docMk/>
-            <pc:sldMk cId="0" sldId="257"/>
-            <ac:grpSpMk id="15" creationId="{00000000-0000-0000-0000-000000000000}"/>
-          </ac:grpSpMkLst>
-        </pc:grpChg>
-        <pc:grpChg chg="add mod">
-          <ac:chgData name="Susana Vásquez" userId="dffc548e-2323-4ffc-a8aa-757e426c1faa" providerId="ADAL" clId="{184B16D3-0583-4B86-B9E2-32A8C8837C3C}" dt="2025-03-03T11:27:29.444" v="1060"/>
-          <ac:grpSpMkLst>
-            <pc:docMk/>
-            <pc:sldMk cId="0" sldId="257"/>
-            <ac:grpSpMk id="32" creationId="{1975CA51-EF1D-03A7-D7CD-47E654EAEA04}"/>
-          </ac:grpSpMkLst>
-        </pc:grpChg>
       </pc:sldChg>
       <pc:sldChg chg="addSp modSp mod">
         <pc:chgData name="Susana Vásquez" userId="dffc548e-2323-4ffc-a8aa-757e426c1faa" providerId="ADAL" clId="{184B16D3-0583-4B86-B9E2-32A8C8837C3C}" dt="2025-03-03T11:28:08.158" v="1068" actId="1076"/>
@@ -447,94 +207,6 @@
           <pc:docMk/>
           <pc:sldMk cId="0" sldId="261"/>
         </pc:sldMkLst>
-        <pc:spChg chg="mod">
-          <ac:chgData name="Susana Vásquez" userId="dffc548e-2323-4ffc-a8aa-757e426c1faa" providerId="ADAL" clId="{184B16D3-0583-4B86-B9E2-32A8C8837C3C}" dt="2025-03-03T11:23:45.408" v="1002" actId="790"/>
-          <ac:spMkLst>
-            <pc:docMk/>
-            <pc:sldMk cId="0" sldId="261"/>
-            <ac:spMk id="4" creationId="{00000000-0000-0000-0000-000000000000}"/>
-          </ac:spMkLst>
-        </pc:spChg>
-        <pc:spChg chg="mod">
-          <ac:chgData name="Susana Vásquez" userId="dffc548e-2323-4ffc-a8aa-757e426c1faa" providerId="ADAL" clId="{184B16D3-0583-4B86-B9E2-32A8C8837C3C}" dt="2025-03-03T11:23:45.408" v="1002" actId="790"/>
-          <ac:spMkLst>
-            <pc:docMk/>
-            <pc:sldMk cId="0" sldId="261"/>
-            <ac:spMk id="5" creationId="{00000000-0000-0000-0000-000000000000}"/>
-          </ac:spMkLst>
-        </pc:spChg>
-        <pc:spChg chg="mod">
-          <ac:chgData name="Susana Vásquez" userId="dffc548e-2323-4ffc-a8aa-757e426c1faa" providerId="ADAL" clId="{184B16D3-0583-4B86-B9E2-32A8C8837C3C}" dt="2025-03-03T11:23:45.408" v="1002" actId="790"/>
-          <ac:spMkLst>
-            <pc:docMk/>
-            <pc:sldMk cId="0" sldId="261"/>
-            <ac:spMk id="6" creationId="{00000000-0000-0000-0000-000000000000}"/>
-          </ac:spMkLst>
-        </pc:spChg>
-        <pc:spChg chg="mod">
-          <ac:chgData name="Susana Vásquez" userId="dffc548e-2323-4ffc-a8aa-757e426c1faa" providerId="ADAL" clId="{184B16D3-0583-4B86-B9E2-32A8C8837C3C}" dt="2025-03-03T11:23:45.408" v="1002" actId="790"/>
-          <ac:spMkLst>
-            <pc:docMk/>
-            <pc:sldMk cId="0" sldId="261"/>
-            <ac:spMk id="7" creationId="{00000000-0000-0000-0000-000000000000}"/>
-          </ac:spMkLst>
-        </pc:spChg>
-        <pc:spChg chg="mod">
-          <ac:chgData name="Susana Vásquez" userId="dffc548e-2323-4ffc-a8aa-757e426c1faa" providerId="ADAL" clId="{184B16D3-0583-4B86-B9E2-32A8C8837C3C}" dt="2025-03-03T11:23:45.408" v="1002" actId="790"/>
-          <ac:spMkLst>
-            <pc:docMk/>
-            <pc:sldMk cId="0" sldId="261"/>
-            <ac:spMk id="8" creationId="{00000000-0000-0000-0000-000000000000}"/>
-          </ac:spMkLst>
-        </pc:spChg>
-        <pc:spChg chg="mod">
-          <ac:chgData name="Susana Vásquez" userId="dffc548e-2323-4ffc-a8aa-757e426c1faa" providerId="ADAL" clId="{184B16D3-0583-4B86-B9E2-32A8C8837C3C}" dt="2025-03-03T11:23:45.408" v="1002" actId="790"/>
-          <ac:spMkLst>
-            <pc:docMk/>
-            <pc:sldMk cId="0" sldId="261"/>
-            <ac:spMk id="10" creationId="{00000000-0000-0000-0000-000000000000}"/>
-          </ac:spMkLst>
-        </pc:spChg>
-        <pc:spChg chg="mod">
-          <ac:chgData name="Susana Vásquez" userId="dffc548e-2323-4ffc-a8aa-757e426c1faa" providerId="ADAL" clId="{184B16D3-0583-4B86-B9E2-32A8C8837C3C}" dt="2025-03-03T11:23:45.408" v="1002" actId="790"/>
-          <ac:spMkLst>
-            <pc:docMk/>
-            <pc:sldMk cId="0" sldId="261"/>
-            <ac:spMk id="11" creationId="{00000000-0000-0000-0000-000000000000}"/>
-          </ac:spMkLst>
-        </pc:spChg>
-        <pc:spChg chg="mod">
-          <ac:chgData name="Susana Vásquez" userId="dffc548e-2323-4ffc-a8aa-757e426c1faa" providerId="ADAL" clId="{184B16D3-0583-4B86-B9E2-32A8C8837C3C}" dt="2025-03-03T11:23:45.408" v="1002" actId="790"/>
-          <ac:spMkLst>
-            <pc:docMk/>
-            <pc:sldMk cId="0" sldId="261"/>
-            <ac:spMk id="16" creationId="{00000000-0000-0000-0000-000000000000}"/>
-          </ac:spMkLst>
-        </pc:spChg>
-        <pc:spChg chg="mod">
-          <ac:chgData name="Susana Vásquez" userId="dffc548e-2323-4ffc-a8aa-757e426c1faa" providerId="ADAL" clId="{184B16D3-0583-4B86-B9E2-32A8C8837C3C}" dt="2025-03-03T11:23:45.408" v="1002" actId="790"/>
-          <ac:spMkLst>
-            <pc:docMk/>
-            <pc:sldMk cId="0" sldId="261"/>
-            <ac:spMk id="18" creationId="{00000000-0000-0000-0000-000000000000}"/>
-          </ac:spMkLst>
-        </pc:spChg>
-        <pc:spChg chg="mod">
-          <ac:chgData name="Susana Vásquez" userId="dffc548e-2323-4ffc-a8aa-757e426c1faa" providerId="ADAL" clId="{184B16D3-0583-4B86-B9E2-32A8C8837C3C}" dt="2025-03-03T11:23:45.408" v="1002" actId="790"/>
-          <ac:spMkLst>
-            <pc:docMk/>
-            <pc:sldMk cId="0" sldId="261"/>
-            <ac:spMk id="20" creationId="{4873AF9D-5F3B-74AE-EFB1-E907E9FBBAB9}"/>
-          </ac:spMkLst>
-        </pc:spChg>
-        <pc:graphicFrameChg chg="add mod">
-          <ac:chgData name="Susana Vásquez" userId="dffc548e-2323-4ffc-a8aa-757e426c1faa" providerId="ADAL" clId="{184B16D3-0583-4B86-B9E2-32A8C8837C3C}" dt="2025-03-03T11:28:08.158" v="1068" actId="1076"/>
-          <ac:graphicFrameMkLst>
-            <pc:docMk/>
-            <pc:sldMk cId="0" sldId="261"/>
-            <ac:graphicFrameMk id="19" creationId="{FE62FC96-8B65-76F3-5513-CC1BE6CFEC34}"/>
-          </ac:graphicFrameMkLst>
-        </pc:graphicFrameChg>
       </pc:sldChg>
       <pc:sldChg chg="addSp delSp modSp mod">
         <pc:chgData name="Susana Vásquez" userId="dffc548e-2323-4ffc-a8aa-757e426c1faa" providerId="ADAL" clId="{184B16D3-0583-4B86-B9E2-32A8C8837C3C}" dt="2025-03-03T11:27:49.542" v="1066"/>
@@ -542,158 +214,6 @@
           <pc:docMk/>
           <pc:sldMk cId="4076031532" sldId="275"/>
         </pc:sldMkLst>
-        <pc:spChg chg="mod">
-          <ac:chgData name="Susana Vásquez" userId="dffc548e-2323-4ffc-a8aa-757e426c1faa" providerId="ADAL" clId="{184B16D3-0583-4B86-B9E2-32A8C8837C3C}" dt="2025-03-03T11:23:45.408" v="1002" actId="790"/>
-          <ac:spMkLst>
-            <pc:docMk/>
-            <pc:sldMk cId="4076031532" sldId="275"/>
-            <ac:spMk id="3" creationId="{759FA59C-C289-9543-5201-E1F1B46C2BEA}"/>
-          </ac:spMkLst>
-        </pc:spChg>
-        <pc:spChg chg="mod">
-          <ac:chgData name="Susana Vásquez" userId="dffc548e-2323-4ffc-a8aa-757e426c1faa" providerId="ADAL" clId="{184B16D3-0583-4B86-B9E2-32A8C8837C3C}" dt="2025-03-03T11:23:45.408" v="1002" actId="790"/>
-          <ac:spMkLst>
-            <pc:docMk/>
-            <pc:sldMk cId="4076031532" sldId="275"/>
-            <ac:spMk id="5" creationId="{BEFA780B-8C25-53ED-20E7-289D54104D70}"/>
-          </ac:spMkLst>
-        </pc:spChg>
-        <pc:spChg chg="mod">
-          <ac:chgData name="Susana Vásquez" userId="dffc548e-2323-4ffc-a8aa-757e426c1faa" providerId="ADAL" clId="{184B16D3-0583-4B86-B9E2-32A8C8837C3C}" dt="2025-03-03T11:23:45.408" v="1002" actId="790"/>
-          <ac:spMkLst>
-            <pc:docMk/>
-            <pc:sldMk cId="4076031532" sldId="275"/>
-            <ac:spMk id="6" creationId="{6523BCA3-F1CB-73A3-230B-F5CDC3772441}"/>
-          </ac:spMkLst>
-        </pc:spChg>
-        <pc:spChg chg="mod">
-          <ac:chgData name="Susana Vásquez" userId="dffc548e-2323-4ffc-a8aa-757e426c1faa" providerId="ADAL" clId="{184B16D3-0583-4B86-B9E2-32A8C8837C3C}" dt="2025-03-03T11:23:45.408" v="1002" actId="790"/>
-          <ac:spMkLst>
-            <pc:docMk/>
-            <pc:sldMk cId="4076031532" sldId="275"/>
-            <ac:spMk id="7" creationId="{637433B4-9A07-820B-91A9-AF33A0BF4BA7}"/>
-          </ac:spMkLst>
-        </pc:spChg>
-        <pc:spChg chg="mod">
-          <ac:chgData name="Susana Vásquez" userId="dffc548e-2323-4ffc-a8aa-757e426c1faa" providerId="ADAL" clId="{184B16D3-0583-4B86-B9E2-32A8C8837C3C}" dt="2025-03-03T11:23:45.408" v="1002" actId="790"/>
-          <ac:spMkLst>
-            <pc:docMk/>
-            <pc:sldMk cId="4076031532" sldId="275"/>
-            <ac:spMk id="8" creationId="{C597E2AF-29D0-90DF-2B6E-E91172FD51D7}"/>
-          </ac:spMkLst>
-        </pc:spChg>
-        <pc:spChg chg="del topLvl">
-          <ac:chgData name="Susana Vásquez" userId="dffc548e-2323-4ffc-a8aa-757e426c1faa" providerId="ADAL" clId="{184B16D3-0583-4B86-B9E2-32A8C8837C3C}" dt="2025-03-03T11:27:44.426" v="1063" actId="478"/>
-          <ac:spMkLst>
-            <pc:docMk/>
-            <pc:sldMk cId="4076031532" sldId="275"/>
-            <ac:spMk id="10" creationId="{23B8934B-135F-2AB3-5692-81DE62F378A4}"/>
-          </ac:spMkLst>
-        </pc:spChg>
-        <pc:spChg chg="topLvl">
-          <ac:chgData name="Susana Vásquez" userId="dffc548e-2323-4ffc-a8aa-757e426c1faa" providerId="ADAL" clId="{184B16D3-0583-4B86-B9E2-32A8C8837C3C}" dt="2025-03-03T11:27:44.426" v="1063" actId="478"/>
-          <ac:spMkLst>
-            <pc:docMk/>
-            <pc:sldMk cId="4076031532" sldId="275"/>
-            <ac:spMk id="11" creationId="{F883F80D-6230-CCF7-D5CF-17502D260CDD}"/>
-          </ac:spMkLst>
-        </pc:spChg>
-        <pc:spChg chg="del mod">
-          <ac:chgData name="Susana Vásquez" userId="dffc548e-2323-4ffc-a8aa-757e426c1faa" providerId="ADAL" clId="{184B16D3-0583-4B86-B9E2-32A8C8837C3C}" dt="2025-03-03T11:27:47.643" v="1064" actId="478"/>
-          <ac:spMkLst>
-            <pc:docMk/>
-            <pc:sldMk cId="4076031532" sldId="275"/>
-            <ac:spMk id="13" creationId="{2A8DB375-7F54-303B-78FA-E50E53B764E5}"/>
-          </ac:spMkLst>
-        </pc:spChg>
-        <pc:spChg chg="mod">
-          <ac:chgData name="Susana Vásquez" userId="dffc548e-2323-4ffc-a8aa-757e426c1faa" providerId="ADAL" clId="{184B16D3-0583-4B86-B9E2-32A8C8837C3C}" dt="2025-03-03T11:26:50.569" v="1053" actId="20577"/>
-          <ac:spMkLst>
-            <pc:docMk/>
-            <pc:sldMk cId="4076031532" sldId="275"/>
-            <ac:spMk id="14" creationId="{0C9D3D7C-B91A-D9ED-9DA8-D0DEA3875568}"/>
-          </ac:spMkLst>
-        </pc:spChg>
-        <pc:spChg chg="mod">
-          <ac:chgData name="Susana Vásquez" userId="dffc548e-2323-4ffc-a8aa-757e426c1faa" providerId="ADAL" clId="{184B16D3-0583-4B86-B9E2-32A8C8837C3C}" dt="2025-03-03T11:23:45.408" v="1002" actId="790"/>
-          <ac:spMkLst>
-            <pc:docMk/>
-            <pc:sldMk cId="4076031532" sldId="275"/>
-            <ac:spMk id="16" creationId="{4F21CBC5-A638-C7E7-3680-842FB6B34F91}"/>
-          </ac:spMkLst>
-        </pc:spChg>
-        <pc:spChg chg="mod">
-          <ac:chgData name="Susana Vásquez" userId="dffc548e-2323-4ffc-a8aa-757e426c1faa" providerId="ADAL" clId="{184B16D3-0583-4B86-B9E2-32A8C8837C3C}" dt="2025-03-03T11:23:45.408" v="1002" actId="790"/>
-          <ac:spMkLst>
-            <pc:docMk/>
-            <pc:sldMk cId="4076031532" sldId="275"/>
-            <ac:spMk id="17" creationId="{EBACB67A-6094-3D82-D471-37306623B5B0}"/>
-          </ac:spMkLst>
-        </pc:spChg>
-        <pc:spChg chg="mod">
-          <ac:chgData name="Susana Vásquez" userId="dffc548e-2323-4ffc-a8aa-757e426c1faa" providerId="ADAL" clId="{184B16D3-0583-4B86-B9E2-32A8C8837C3C}" dt="2025-03-03T11:27:49.542" v="1066"/>
-          <ac:spMkLst>
-            <pc:docMk/>
-            <pc:sldMk cId="4076031532" sldId="275"/>
-            <ac:spMk id="20" creationId="{587E4C34-10B4-A5F2-0A8A-FA9EE4696BC4}"/>
-          </ac:spMkLst>
-        </pc:spChg>
-        <pc:spChg chg="mod">
-          <ac:chgData name="Susana Vásquez" userId="dffc548e-2323-4ffc-a8aa-757e426c1faa" providerId="ADAL" clId="{184B16D3-0583-4B86-B9E2-32A8C8837C3C}" dt="2025-03-03T11:27:49.542" v="1066"/>
-          <ac:spMkLst>
-            <pc:docMk/>
-            <pc:sldMk cId="4076031532" sldId="275"/>
-            <ac:spMk id="21" creationId="{8A7D686F-F5E6-CB3A-D1F4-E0A2A4282BC0}"/>
-          </ac:spMkLst>
-        </pc:spChg>
-        <pc:spChg chg="add mod">
-          <ac:chgData name="Susana Vásquez" userId="dffc548e-2323-4ffc-a8aa-757e426c1faa" providerId="ADAL" clId="{184B16D3-0583-4B86-B9E2-32A8C8837C3C}" dt="2025-03-03T11:27:49.542" v="1066"/>
-          <ac:spMkLst>
-            <pc:docMk/>
-            <pc:sldMk cId="4076031532" sldId="275"/>
-            <ac:spMk id="22" creationId="{5A222DCC-0637-1EB4-1A99-A7C543670384}"/>
-          </ac:spMkLst>
-        </pc:spChg>
-        <pc:spChg chg="mod">
-          <ac:chgData name="Susana Vásquez" userId="dffc548e-2323-4ffc-a8aa-757e426c1faa" providerId="ADAL" clId="{184B16D3-0583-4B86-B9E2-32A8C8837C3C}" dt="2025-03-03T11:23:45.408" v="1002" actId="790"/>
-          <ac:spMkLst>
-            <pc:docMk/>
-            <pc:sldMk cId="4076031532" sldId="275"/>
-            <ac:spMk id="29" creationId="{A74710B7-8D4B-5FCF-C98C-03751F622F15}"/>
-          </ac:spMkLst>
-        </pc:spChg>
-        <pc:spChg chg="mod">
-          <ac:chgData name="Susana Vásquez" userId="dffc548e-2323-4ffc-a8aa-757e426c1faa" providerId="ADAL" clId="{184B16D3-0583-4B86-B9E2-32A8C8837C3C}" dt="2025-03-03T11:23:45.408" v="1002" actId="790"/>
-          <ac:spMkLst>
-            <pc:docMk/>
-            <pc:sldMk cId="4076031532" sldId="275"/>
-            <ac:spMk id="30" creationId="{96EC8075-DFE8-8870-E444-7D868A5B9A8B}"/>
-          </ac:spMkLst>
-        </pc:spChg>
-        <pc:grpChg chg="add del">
-          <ac:chgData name="Susana Vásquez" userId="dffc548e-2323-4ffc-a8aa-757e426c1faa" providerId="ADAL" clId="{184B16D3-0583-4B86-B9E2-32A8C8837C3C}" dt="2025-03-03T11:27:44.426" v="1063" actId="478"/>
-          <ac:grpSpMkLst>
-            <pc:docMk/>
-            <pc:sldMk cId="4076031532" sldId="275"/>
-            <ac:grpSpMk id="9" creationId="{02EFE059-1AA4-1EB0-E17D-FE346445E552}"/>
-          </ac:grpSpMkLst>
-        </pc:grpChg>
-        <pc:grpChg chg="del">
-          <ac:chgData name="Susana Vásquez" userId="dffc548e-2323-4ffc-a8aa-757e426c1faa" providerId="ADAL" clId="{184B16D3-0583-4B86-B9E2-32A8C8837C3C}" dt="2025-03-03T11:27:49.195" v="1065" actId="478"/>
-          <ac:grpSpMkLst>
-            <pc:docMk/>
-            <pc:sldMk cId="4076031532" sldId="275"/>
-            <ac:grpSpMk id="15" creationId="{D562705E-755F-EF58-7147-FFF120113C4B}"/>
-          </ac:grpSpMkLst>
-        </pc:grpChg>
-        <pc:grpChg chg="add mod">
-          <ac:chgData name="Susana Vásquez" userId="dffc548e-2323-4ffc-a8aa-757e426c1faa" providerId="ADAL" clId="{184B16D3-0583-4B86-B9E2-32A8C8837C3C}" dt="2025-03-03T11:27:49.542" v="1066"/>
-          <ac:grpSpMkLst>
-            <pc:docMk/>
-            <pc:sldMk cId="4076031532" sldId="275"/>
-            <ac:grpSpMk id="19" creationId="{95633102-63E3-2386-94EC-777E92D87123}"/>
-          </ac:grpSpMkLst>
-        </pc:grpChg>
       </pc:sldChg>
       <pc:sldChg chg="addSp modSp mod">
         <pc:chgData name="Susana Vásquez" userId="dffc548e-2323-4ffc-a8aa-757e426c1faa" providerId="ADAL" clId="{184B16D3-0583-4B86-B9E2-32A8C8837C3C}" dt="2025-03-03T11:28:13.747" v="1070" actId="1076"/>
@@ -701,94 +221,6 @@
           <pc:docMk/>
           <pc:sldMk cId="75129213" sldId="276"/>
         </pc:sldMkLst>
-        <pc:spChg chg="mod">
-          <ac:chgData name="Susana Vásquez" userId="dffc548e-2323-4ffc-a8aa-757e426c1faa" providerId="ADAL" clId="{184B16D3-0583-4B86-B9E2-32A8C8837C3C}" dt="2025-03-03T11:23:45.408" v="1002" actId="790"/>
-          <ac:spMkLst>
-            <pc:docMk/>
-            <pc:sldMk cId="75129213" sldId="276"/>
-            <ac:spMk id="3" creationId="{12AFFB44-F5C2-A7A4-B2E9-C7EFDCEA7E31}"/>
-          </ac:spMkLst>
-        </pc:spChg>
-        <pc:spChg chg="mod">
-          <ac:chgData name="Susana Vásquez" userId="dffc548e-2323-4ffc-a8aa-757e426c1faa" providerId="ADAL" clId="{184B16D3-0583-4B86-B9E2-32A8C8837C3C}" dt="2025-03-03T11:23:45.408" v="1002" actId="790"/>
-          <ac:spMkLst>
-            <pc:docMk/>
-            <pc:sldMk cId="75129213" sldId="276"/>
-            <ac:spMk id="4" creationId="{553A5A7C-93D6-7520-E043-EC0626AEA699}"/>
-          </ac:spMkLst>
-        </pc:spChg>
-        <pc:spChg chg="mod">
-          <ac:chgData name="Susana Vásquez" userId="dffc548e-2323-4ffc-a8aa-757e426c1faa" providerId="ADAL" clId="{184B16D3-0583-4B86-B9E2-32A8C8837C3C}" dt="2025-03-03T11:23:45.408" v="1002" actId="790"/>
-          <ac:spMkLst>
-            <pc:docMk/>
-            <pc:sldMk cId="75129213" sldId="276"/>
-            <ac:spMk id="7" creationId="{D388A215-4C8E-71AC-7004-573F245D3D04}"/>
-          </ac:spMkLst>
-        </pc:spChg>
-        <pc:spChg chg="mod">
-          <ac:chgData name="Susana Vásquez" userId="dffc548e-2323-4ffc-a8aa-757e426c1faa" providerId="ADAL" clId="{184B16D3-0583-4B86-B9E2-32A8C8837C3C}" dt="2025-03-03T11:23:45.408" v="1002" actId="790"/>
-          <ac:spMkLst>
-            <pc:docMk/>
-            <pc:sldMk cId="75129213" sldId="276"/>
-            <ac:spMk id="8" creationId="{02B70CCF-F59D-F7DD-C590-8A1C93FE72E1}"/>
-          </ac:spMkLst>
-        </pc:spChg>
-        <pc:spChg chg="mod">
-          <ac:chgData name="Susana Vásquez" userId="dffc548e-2323-4ffc-a8aa-757e426c1faa" providerId="ADAL" clId="{184B16D3-0583-4B86-B9E2-32A8C8837C3C}" dt="2025-03-03T11:23:45.408" v="1002" actId="790"/>
-          <ac:spMkLst>
-            <pc:docMk/>
-            <pc:sldMk cId="75129213" sldId="276"/>
-            <ac:spMk id="10" creationId="{70F5B85D-4EC8-9D13-D1D5-99D719D125BF}"/>
-          </ac:spMkLst>
-        </pc:spChg>
-        <pc:spChg chg="mod">
-          <ac:chgData name="Susana Vásquez" userId="dffc548e-2323-4ffc-a8aa-757e426c1faa" providerId="ADAL" clId="{184B16D3-0583-4B86-B9E2-32A8C8837C3C}" dt="2025-03-03T11:23:45.408" v="1002" actId="790"/>
-          <ac:spMkLst>
-            <pc:docMk/>
-            <pc:sldMk cId="75129213" sldId="276"/>
-            <ac:spMk id="11" creationId="{6290A7D6-706C-61C7-F91D-E568B9983EF7}"/>
-          </ac:spMkLst>
-        </pc:spChg>
-        <pc:spChg chg="mod">
-          <ac:chgData name="Susana Vásquez" userId="dffc548e-2323-4ffc-a8aa-757e426c1faa" providerId="ADAL" clId="{184B16D3-0583-4B86-B9E2-32A8C8837C3C}" dt="2025-03-03T11:23:45.408" v="1002" actId="790"/>
-          <ac:spMkLst>
-            <pc:docMk/>
-            <pc:sldMk cId="75129213" sldId="276"/>
-            <ac:spMk id="13" creationId="{4F4120BF-9BB6-4F26-50A1-B63C68F5C816}"/>
-          </ac:spMkLst>
-        </pc:spChg>
-        <pc:spChg chg="mod">
-          <ac:chgData name="Susana Vásquez" userId="dffc548e-2323-4ffc-a8aa-757e426c1faa" providerId="ADAL" clId="{184B16D3-0583-4B86-B9E2-32A8C8837C3C}" dt="2025-03-03T11:23:45.408" v="1002" actId="790"/>
-          <ac:spMkLst>
-            <pc:docMk/>
-            <pc:sldMk cId="75129213" sldId="276"/>
-            <ac:spMk id="14" creationId="{4DD67EE6-D22D-99D7-8482-C4D804F5571E}"/>
-          </ac:spMkLst>
-        </pc:spChg>
-        <pc:spChg chg="mod">
-          <ac:chgData name="Susana Vásquez" userId="dffc548e-2323-4ffc-a8aa-757e426c1faa" providerId="ADAL" clId="{184B16D3-0583-4B86-B9E2-32A8C8837C3C}" dt="2025-03-03T11:23:45.408" v="1002" actId="790"/>
-          <ac:spMkLst>
-            <pc:docMk/>
-            <pc:sldMk cId="75129213" sldId="276"/>
-            <ac:spMk id="17" creationId="{C38C61D7-3ECB-FF7E-1E26-48C6AB006CE9}"/>
-          </ac:spMkLst>
-        </pc:spChg>
-        <pc:spChg chg="mod">
-          <ac:chgData name="Susana Vásquez" userId="dffc548e-2323-4ffc-a8aa-757e426c1faa" providerId="ADAL" clId="{184B16D3-0583-4B86-B9E2-32A8C8837C3C}" dt="2025-03-03T11:23:45.408" v="1002" actId="790"/>
-          <ac:spMkLst>
-            <pc:docMk/>
-            <pc:sldMk cId="75129213" sldId="276"/>
-            <ac:spMk id="20" creationId="{801AEE38-CEC5-7ED8-3342-E42F5140A57F}"/>
-          </ac:spMkLst>
-        </pc:spChg>
-        <pc:graphicFrameChg chg="add mod">
-          <ac:chgData name="Susana Vásquez" userId="dffc548e-2323-4ffc-a8aa-757e426c1faa" providerId="ADAL" clId="{184B16D3-0583-4B86-B9E2-32A8C8837C3C}" dt="2025-03-03T11:28:13.747" v="1070" actId="1076"/>
-          <ac:graphicFrameMkLst>
-            <pc:docMk/>
-            <pc:sldMk cId="75129213" sldId="276"/>
-            <ac:graphicFrameMk id="19" creationId="{5533EBFC-C8DD-826F-E8D6-6F47B7619B4C}"/>
-          </ac:graphicFrameMkLst>
-        </pc:graphicFrameChg>
       </pc:sldChg>
       <pc:sldChg chg="modSp mod">
         <pc:chgData name="Susana Vásquez" userId="dffc548e-2323-4ffc-a8aa-757e426c1faa" providerId="ADAL" clId="{184B16D3-0583-4B86-B9E2-32A8C8837C3C}" dt="2025-03-03T11:24:07.047" v="1005" actId="12"/>
@@ -796,94 +228,6 @@
           <pc:docMk/>
           <pc:sldMk cId="823424723" sldId="277"/>
         </pc:sldMkLst>
-        <pc:spChg chg="mod">
-          <ac:chgData name="Susana Vásquez" userId="dffc548e-2323-4ffc-a8aa-757e426c1faa" providerId="ADAL" clId="{184B16D3-0583-4B86-B9E2-32A8C8837C3C}" dt="2025-03-03T11:23:45.408" v="1002" actId="790"/>
-          <ac:spMkLst>
-            <pc:docMk/>
-            <pc:sldMk cId="823424723" sldId="277"/>
-            <ac:spMk id="3" creationId="{E3E8C6CC-D0C8-6B00-E41E-A00D909FFA93}"/>
-          </ac:spMkLst>
-        </pc:spChg>
-        <pc:spChg chg="mod">
-          <ac:chgData name="Susana Vásquez" userId="dffc548e-2323-4ffc-a8aa-757e426c1faa" providerId="ADAL" clId="{184B16D3-0583-4B86-B9E2-32A8C8837C3C}" dt="2025-03-03T11:23:45.408" v="1002" actId="790"/>
-          <ac:spMkLst>
-            <pc:docMk/>
-            <pc:sldMk cId="823424723" sldId="277"/>
-            <ac:spMk id="5" creationId="{491E1CD9-124E-5DC1-EB03-E524220BCBB0}"/>
-          </ac:spMkLst>
-        </pc:spChg>
-        <pc:spChg chg="mod">
-          <ac:chgData name="Susana Vásquez" userId="dffc548e-2323-4ffc-a8aa-757e426c1faa" providerId="ADAL" clId="{184B16D3-0583-4B86-B9E2-32A8C8837C3C}" dt="2025-03-03T11:23:45.408" v="1002" actId="790"/>
-          <ac:spMkLst>
-            <pc:docMk/>
-            <pc:sldMk cId="823424723" sldId="277"/>
-            <ac:spMk id="6" creationId="{3B4D39DE-A450-6EBF-6C9A-FC31116D04AB}"/>
-          </ac:spMkLst>
-        </pc:spChg>
-        <pc:spChg chg="mod">
-          <ac:chgData name="Susana Vásquez" userId="dffc548e-2323-4ffc-a8aa-757e426c1faa" providerId="ADAL" clId="{184B16D3-0583-4B86-B9E2-32A8C8837C3C}" dt="2025-03-03T11:23:45.408" v="1002" actId="790"/>
-          <ac:spMkLst>
-            <pc:docMk/>
-            <pc:sldMk cId="823424723" sldId="277"/>
-            <ac:spMk id="7" creationId="{BAD6B038-8C96-6681-3E28-E130722E4652}"/>
-          </ac:spMkLst>
-        </pc:spChg>
-        <pc:spChg chg="mod">
-          <ac:chgData name="Susana Vásquez" userId="dffc548e-2323-4ffc-a8aa-757e426c1faa" providerId="ADAL" clId="{184B16D3-0583-4B86-B9E2-32A8C8837C3C}" dt="2025-03-03T11:23:45.408" v="1002" actId="790"/>
-          <ac:spMkLst>
-            <pc:docMk/>
-            <pc:sldMk cId="823424723" sldId="277"/>
-            <ac:spMk id="8" creationId="{7CFDB6C7-C02E-D9A9-E446-3DAC3D24797D}"/>
-          </ac:spMkLst>
-        </pc:spChg>
-        <pc:spChg chg="mod">
-          <ac:chgData name="Susana Vásquez" userId="dffc548e-2323-4ffc-a8aa-757e426c1faa" providerId="ADAL" clId="{184B16D3-0583-4B86-B9E2-32A8C8837C3C}" dt="2025-03-03T11:23:45.408" v="1002" actId="790"/>
-          <ac:spMkLst>
-            <pc:docMk/>
-            <pc:sldMk cId="823424723" sldId="277"/>
-            <ac:spMk id="11" creationId="{D5379536-8E4E-49AE-87DD-CFA5A44A4901}"/>
-          </ac:spMkLst>
-        </pc:spChg>
-        <pc:spChg chg="mod">
-          <ac:chgData name="Susana Vásquez" userId="dffc548e-2323-4ffc-a8aa-757e426c1faa" providerId="ADAL" clId="{184B16D3-0583-4B86-B9E2-32A8C8837C3C}" dt="2025-03-03T11:23:45.408" v="1002" actId="790"/>
-          <ac:spMkLst>
-            <pc:docMk/>
-            <pc:sldMk cId="823424723" sldId="277"/>
-            <ac:spMk id="13" creationId="{2A669FD6-086D-42FC-54FF-47A3E8326214}"/>
-          </ac:spMkLst>
-        </pc:spChg>
-        <pc:spChg chg="mod">
-          <ac:chgData name="Susana Vásquez" userId="dffc548e-2323-4ffc-a8aa-757e426c1faa" providerId="ADAL" clId="{184B16D3-0583-4B86-B9E2-32A8C8837C3C}" dt="2025-03-03T11:23:45.408" v="1002" actId="790"/>
-          <ac:spMkLst>
-            <pc:docMk/>
-            <pc:sldMk cId="823424723" sldId="277"/>
-            <ac:spMk id="14" creationId="{572AE04F-30B1-5A2F-9ED8-6AA7FE5ABE75}"/>
-          </ac:spMkLst>
-        </pc:spChg>
-        <pc:spChg chg="mod">
-          <ac:chgData name="Susana Vásquez" userId="dffc548e-2323-4ffc-a8aa-757e426c1faa" providerId="ADAL" clId="{184B16D3-0583-4B86-B9E2-32A8C8837C3C}" dt="2025-03-03T11:23:45.408" v="1002" actId="790"/>
-          <ac:spMkLst>
-            <pc:docMk/>
-            <pc:sldMk cId="823424723" sldId="277"/>
-            <ac:spMk id="18" creationId="{36FCF92C-63DB-93ED-CD06-7D33E5FB3897}"/>
-          </ac:spMkLst>
-        </pc:spChg>
-        <pc:spChg chg="mod">
-          <ac:chgData name="Susana Vásquez" userId="dffc548e-2323-4ffc-a8aa-757e426c1faa" providerId="ADAL" clId="{184B16D3-0583-4B86-B9E2-32A8C8837C3C}" dt="2025-03-03T11:23:45.408" v="1002" actId="790"/>
-          <ac:spMkLst>
-            <pc:docMk/>
-            <pc:sldMk cId="823424723" sldId="277"/>
-            <ac:spMk id="19" creationId="{5B79CE0C-3FF6-0250-D3F9-70ADD509C8AE}"/>
-          </ac:spMkLst>
-        </pc:spChg>
-        <pc:graphicFrameChg chg="mod modGraphic">
-          <ac:chgData name="Susana Vásquez" userId="dffc548e-2323-4ffc-a8aa-757e426c1faa" providerId="ADAL" clId="{184B16D3-0583-4B86-B9E2-32A8C8837C3C}" dt="2025-03-03T11:24:07.047" v="1005" actId="12"/>
-          <ac:graphicFrameMkLst>
-            <pc:docMk/>
-            <pc:sldMk cId="823424723" sldId="277"/>
-            <ac:graphicFrameMk id="22" creationId="{122C398A-54E7-C8D0-A32D-61CC4F3C6769}"/>
-          </ac:graphicFrameMkLst>
-        </pc:graphicFrameChg>
       </pc:sldChg>
     </pc:docChg>
   </pc:docChgLst>
@@ -1070,7 +414,7 @@
             <a:fld id="{1D8BD707-D9CF-40AE-B4C6-C98DA3205C09}" type="datetimeFigureOut">
               <a:rPr lang="en-US" smtClean="0"/>
               <a:pPr/>
-              <a:t>3/3/2025</a:t>
+              <a:t>10/16/2025</a:t>
             </a:fld>
             <a:endParaRPr lang="en-US"/>
           </a:p>
@@ -1235,7 +579,7 @@
             <a:fld id="{1D8BD707-D9CF-40AE-B4C6-C98DA3205C09}" type="datetimeFigureOut">
               <a:rPr lang="en-US" smtClean="0"/>
               <a:pPr/>
-              <a:t>3/3/2025</a:t>
+              <a:t>10/16/2025</a:t>
             </a:fld>
             <a:endParaRPr lang="en-US"/>
           </a:p>
@@ -1410,7 +754,7 @@
             <a:fld id="{1D8BD707-D9CF-40AE-B4C6-C98DA3205C09}" type="datetimeFigureOut">
               <a:rPr lang="en-US" smtClean="0"/>
               <a:pPr/>
-              <a:t>3/3/2025</a:t>
+              <a:t>10/16/2025</a:t>
             </a:fld>
             <a:endParaRPr lang="en-US"/>
           </a:p>
@@ -1575,7 +919,7 @@
             <a:fld id="{1D8BD707-D9CF-40AE-B4C6-C98DA3205C09}" type="datetimeFigureOut">
               <a:rPr lang="en-US" smtClean="0"/>
               <a:pPr/>
-              <a:t>3/3/2025</a:t>
+              <a:t>10/16/2025</a:t>
             </a:fld>
             <a:endParaRPr lang="en-US"/>
           </a:p>
@@ -1817,7 +1161,7 @@
             <a:fld id="{1D8BD707-D9CF-40AE-B4C6-C98DA3205C09}" type="datetimeFigureOut">
               <a:rPr lang="en-US" smtClean="0"/>
               <a:pPr/>
-              <a:t>3/3/2025</a:t>
+              <a:t>10/16/2025</a:t>
             </a:fld>
             <a:endParaRPr lang="en-US"/>
           </a:p>
@@ -2099,7 +1443,7 @@
             <a:fld id="{1D8BD707-D9CF-40AE-B4C6-C98DA3205C09}" type="datetimeFigureOut">
               <a:rPr lang="en-US" smtClean="0"/>
               <a:pPr/>
-              <a:t>3/3/2025</a:t>
+              <a:t>10/16/2025</a:t>
             </a:fld>
             <a:endParaRPr lang="en-US"/>
           </a:p>
@@ -2515,7 +1859,7 @@
             <a:fld id="{1D8BD707-D9CF-40AE-B4C6-C98DA3205C09}" type="datetimeFigureOut">
               <a:rPr lang="en-US" smtClean="0"/>
               <a:pPr/>
-              <a:t>3/3/2025</a:t>
+              <a:t>10/16/2025</a:t>
             </a:fld>
             <a:endParaRPr lang="en-US"/>
           </a:p>
@@ -2629,7 +1973,7 @@
             <a:fld id="{1D8BD707-D9CF-40AE-B4C6-C98DA3205C09}" type="datetimeFigureOut">
               <a:rPr lang="en-US" smtClean="0"/>
               <a:pPr/>
-              <a:t>3/3/2025</a:t>
+              <a:t>10/16/2025</a:t>
             </a:fld>
             <a:endParaRPr lang="en-US"/>
           </a:p>
@@ -2721,7 +2065,7 @@
             <a:fld id="{1D8BD707-D9CF-40AE-B4C6-C98DA3205C09}" type="datetimeFigureOut">
               <a:rPr lang="en-US" smtClean="0"/>
               <a:pPr/>
-              <a:t>3/3/2025</a:t>
+              <a:t>10/16/2025</a:t>
             </a:fld>
             <a:endParaRPr lang="en-US"/>
           </a:p>
@@ -2993,7 +2337,7 @@
             <a:fld id="{1D8BD707-D9CF-40AE-B4C6-C98DA3205C09}" type="datetimeFigureOut">
               <a:rPr lang="en-US" smtClean="0"/>
               <a:pPr/>
-              <a:t>3/3/2025</a:t>
+              <a:t>10/16/2025</a:t>
             </a:fld>
             <a:endParaRPr lang="en-US"/>
           </a:p>
@@ -3242,7 +2586,7 @@
             <a:fld id="{1D8BD707-D9CF-40AE-B4C6-C98DA3205C09}" type="datetimeFigureOut">
               <a:rPr lang="en-US" smtClean="0"/>
               <a:pPr/>
-              <a:t>3/3/2025</a:t>
+              <a:t>10/16/2025</a:t>
             </a:fld>
             <a:endParaRPr lang="en-US"/>
           </a:p>
@@ -3450,7 +2794,7 @@
             <a:fld id="{1D8BD707-D9CF-40AE-B4C6-C98DA3205C09}" type="datetimeFigureOut">
               <a:rPr lang="en-US" smtClean="0"/>
               <a:pPr/>
-              <a:t>3/3/2025</a:t>
+              <a:t>10/16/2025</a:t>
             </a:fld>
             <a:endParaRPr lang="en-US"/>
           </a:p>
@@ -4402,6 +3746,52 @@
                   <a:srgbClr val="FFFFFF"/>
                 </a:solidFill>
               </a14:hiddenFill>
+            </a:ext>
+          </a:extLst>
+        </p:spPr>
+      </p:pic>
+      <p:pic>
+        <p:nvPicPr>
+          <p:cNvPr id="12" name="Picture 11" descr="A grey square with white text&#10;&#10;AI-generated content may be incorrect.">
+            <a:extLst>
+              <a:ext uri="{FF2B5EF4-FFF2-40B4-BE49-F238E27FC236}">
+                <a16:creationId xmlns:a16="http://schemas.microsoft.com/office/drawing/2014/main" id="{2ADF4236-C311-988C-1EAF-F33444BF8989}"/>
+              </a:ext>
+            </a:extLst>
+          </p:cNvPr>
+          <p:cNvPicPr>
+            <a:picLocks noChangeAspect="1"/>
+          </p:cNvPicPr>
+          <p:nvPr/>
+        </p:nvPicPr>
+        <p:blipFill rotWithShape="1">
+          <a:blip r:embed="rId10">
+            <a:extLst>
+              <a:ext uri="{28A0092B-C50C-407E-A947-70E740481C1C}">
+                <a14:useLocalDpi xmlns:a14="http://schemas.microsoft.com/office/drawing/2010/main" val="0"/>
+              </a:ext>
+            </a:extLst>
+          </a:blip>
+          <a:srcRect r="18171" b="16231"/>
+          <a:stretch>
+            <a:fillRect/>
+          </a:stretch>
+        </p:blipFill>
+        <p:spPr bwMode="auto">
+          <a:xfrm>
+            <a:off x="815845" y="9356962"/>
+            <a:ext cx="2092960" cy="556895"/>
+          </a:xfrm>
+          <a:prstGeom prst="rect">
+            <a:avLst/>
+          </a:prstGeom>
+          <a:noFill/>
+          <a:ln>
+            <a:noFill/>
+          </a:ln>
+          <a:extLst>
+            <a:ext uri="{53640926-AAD7-44D8-BBD7-CCE9431645EC}">
+              <a14:shadowObscured xmlns:a14="http://schemas.microsoft.com/office/drawing/2010/main"/>
             </a:ext>
           </a:extLst>
         </p:spPr>
